--- a/dist/초1/수학/모양과비교/초1_수학_모양과비교_01_상자·둥근기둥·공모양.pptx
+++ b/dist/초1/수학/모양과비교/초1_수학_모양과비교_01_상자·둥근기둥·공모양.pptx
@@ -121,13 +121,13 @@
   <p:extLst>
     <p:ext uri="{521415D9-36F7-43E2-AB2F-B90AF26B5E84}">
       <p14:sectionLst xmlns:p14="http://schemas.microsoft.com/office/powerpoint/2010/main">
-        <p14:section name="도입" id="{a84a39e6-8478-3881-3280-f18474ef5b00}">
+        <p14:section name="도입" id="{e2d8d8c7-36a1-b933-0d85-433265a399e4}">
           <p14:sldIdLst>
             <p14:sldId id="256"/>
             <p14:sldId id="257"/>
           </p14:sldIdLst>
         </p14:section>
-        <p14:section name="개념" id="{aadeef68-d1e5-68e0-0fd2-f3120a89ffa8}">
+        <p14:section name="개념" id="{6233af0a-8088-fbc2-9df7-fb040803cc9c}">
           <p14:sldIdLst>
             <p14:sldId id="258"/>
             <p14:sldId id="259"/>
@@ -136,26 +136,26 @@
             <p14:sldId id="262"/>
           </p14:sldIdLst>
         </p14:section>
-        <p14:section name="연습" id="{5e29e5a9-8c53-32bc-b9a9-68433b8d39a8}">
+        <p14:section name="연습" id="{a4a91de5-4a3d-4c83-4a7a-f3a483ae2be3}">
           <p14:sldIdLst>
             <p14:sldId id="263"/>
             <p14:sldId id="264"/>
             <p14:sldId id="265"/>
           </p14:sldIdLst>
         </p14:section>
-        <p14:section name="확인" id="{06a36805-a36e-c78d-a699-537f2febc110}">
+        <p14:section name="확인" id="{c7794350-2911-3cef-e128-60dfc5442f95}">
           <p14:sldIdLst>
             <p14:sldId id="266"/>
             <p14:sldId id="267"/>
             <p14:sldId id="268"/>
           </p14:sldIdLst>
         </p14:section>
-        <p14:section name="정리" id="{8d00c24d-6b1d-1cfe-3152-84b59b8d342a}">
+        <p14:section name="정리" id="{eab13085-3809-1796-6b69-740478cd2f8b}">
           <p14:sldIdLst>
             <p14:sldId id="269"/>
           </p14:sldIdLst>
         </p14:section>
-        <p14:section name="보충" id="{e5a187d5-fe08-490e-d02e-6fc4746ddafc}">
+        <p14:section name="보충" id="{473856b1-4de8-c533-b1eb-8f62ff5a417f}">
           <p14:sldIdLst>
             <p14:sldId id="270"/>
           </p14:sldIdLst>

--- a/dist/초1/수학/모양과비교/초1_수학_모양과비교_01_상자·둥근기둥·공모양.pptx
+++ b/dist/초1/수학/모양과비교/초1_수학_모양과비교_01_상자·둥근기둥·공모양.pptx
@@ -121,13 +121,13 @@
   <p:extLst>
     <p:ext uri="{521415D9-36F7-43E2-AB2F-B90AF26B5E84}">
       <p14:sectionLst xmlns:p14="http://schemas.microsoft.com/office/powerpoint/2010/main">
-        <p14:section name="도입" id="{e2d8d8c7-36a1-b933-0d85-433265a399e4}">
+        <p14:section name="도입" id="{9d0acc49-8240-68df-af68-87cee7d21016}">
           <p14:sldIdLst>
             <p14:sldId id="256"/>
             <p14:sldId id="257"/>
           </p14:sldIdLst>
         </p14:section>
-        <p14:section name="개념" id="{6233af0a-8088-fbc2-9df7-fb040803cc9c}">
+        <p14:section name="개념" id="{7ef639f8-cbcb-ee15-9d1c-d10e52d3ee0a}">
           <p14:sldIdLst>
             <p14:sldId id="258"/>
             <p14:sldId id="259"/>
@@ -136,26 +136,26 @@
             <p14:sldId id="262"/>
           </p14:sldIdLst>
         </p14:section>
-        <p14:section name="연습" id="{a4a91de5-4a3d-4c83-4a7a-f3a483ae2be3}">
+        <p14:section name="연습" id="{267b8955-dcf7-035d-4467-3c32099f3d40}">
           <p14:sldIdLst>
             <p14:sldId id="263"/>
             <p14:sldId id="264"/>
             <p14:sldId id="265"/>
           </p14:sldIdLst>
         </p14:section>
-        <p14:section name="확인" id="{c7794350-2911-3cef-e128-60dfc5442f95}">
+        <p14:section name="확인" id="{6c9a46cd-9a87-9172-60d1-9a1d05b47ca3}">
           <p14:sldIdLst>
             <p14:sldId id="266"/>
             <p14:sldId id="267"/>
             <p14:sldId id="268"/>
           </p14:sldIdLst>
         </p14:section>
-        <p14:section name="정리" id="{eab13085-3809-1796-6b69-740478cd2f8b}">
+        <p14:section name="정리" id="{3db2275b-835b-18a2-6ac6-bd39fa3e66a6}">
           <p14:sldIdLst>
             <p14:sldId id="269"/>
           </p14:sldIdLst>
         </p14:section>
-        <p14:section name="보충" id="{473856b1-4de8-c533-b1eb-8f62ff5a417f}">
+        <p14:section name="보충" id="{e8b99c54-2064-404e-e5b7-436b8fe60020}">
           <p14:sldIdLst>
             <p14:sldId id="270"/>
           </p14:sldIdLst>
@@ -8592,7 +8592,7 @@
           </p:nvPr>
         </p:nvGraphicFramePr>
         <p:xfrm>
-          <a:off x="836676" y="2166620"/>
+          <a:off x="836676" y="2199640"/>
           <a:ext cx="10515600" cy="914400"/>
         </p:xfrm>
         <a:graphic>
@@ -8604,7 +8604,7 @@
                 <a:gridCol w="3364992"/>
                 <a:gridCol w="3785616"/>
               </a:tblGrid>
-              <a:tr h="528320">
+              <a:tr h="511810">
                 <a:tc>
                   <a:txBody>
                     <a:bodyPr/>
@@ -8810,7 +8810,7 @@
                   </a:tcPr>
                 </a:tc>
               </a:tr>
-              <a:tr h="528320">
+              <a:tr h="511810">
                 <a:tc>
                   <a:txBody>
                     <a:bodyPr/>
@@ -9016,7 +9016,7 @@
                   </a:tcPr>
                 </a:tc>
               </a:tr>
-              <a:tr h="528320">
+              <a:tr h="511810">
                 <a:tc>
                   <a:txBody>
                     <a:bodyPr/>
@@ -9222,7 +9222,7 @@
                   </a:tcPr>
                 </a:tc>
               </a:tr>
-              <a:tr h="528320">
+              <a:tr h="511810">
                 <a:tc>
                   <a:txBody>
                     <a:bodyPr/>
